--- a/十字架.pptx
+++ b/十字架.pptx
@@ -109,6 +109,11 @@
       </a:defRPr>
     </a:lvl9pPr>
   </p:defaultTextStyle>
+  <p:extLst>
+    <p:ext uri="{EFAFB233-063F-42B5-8137-9DF3F51BA10A}">
+      <p15:sldGuideLst xmlns:p15="http://schemas.microsoft.com/office/powerpoint/2012/main"/>
+    </p:ext>
+  </p:extLst>
 </p:presentation>
 </file>
 
@@ -150,7 +155,7 @@
           <a:lstStyle/>
           <a:p>
             <a:r>
-              <a:rPr lang="en-US" altLang="zh-TW" smtClean="0"/>
+              <a:rPr lang="en-US" altLang="zh-TW"/>
               <a:t>Click to edit Master title style</a:t>
             </a:r>
             <a:endParaRPr lang="zh-TW" altLang="en-US"/>
@@ -269,7 +274,7 @@
           </a:lstStyle>
           <a:p>
             <a:r>
-              <a:rPr lang="en-US" altLang="zh-TW" smtClean="0"/>
+              <a:rPr lang="en-US" altLang="zh-TW"/>
               <a:t>Click to edit Master subtitle style</a:t>
             </a:r>
             <a:endParaRPr lang="zh-TW" altLang="en-US"/>
@@ -293,7 +298,7 @@
           <a:p>
             <a:fld id="{5FBDD9EC-85A1-494C-B392-9A5C95C3E599}" type="datetimeFigureOut">
               <a:rPr lang="vi-VN" smtClean="0"/>
-              <a:t>30/06/2022</a:t>
+              <a:t>31/05/2025</a:t>
             </a:fld>
             <a:endParaRPr lang="vi-VN"/>
           </a:p>
@@ -387,7 +392,7 @@
           <a:lstStyle/>
           <a:p>
             <a:r>
-              <a:rPr lang="en-US" altLang="zh-TW" smtClean="0"/>
+              <a:rPr lang="en-US" altLang="zh-TW"/>
               <a:t>Click to edit Master title style</a:t>
             </a:r>
             <a:endParaRPr lang="zh-TW" altLang="en-US"/>
@@ -411,35 +416,35 @@
           <a:p>
             <a:pPr lvl="0"/>
             <a:r>
-              <a:rPr lang="en-US" altLang="zh-TW" smtClean="0"/>
+              <a:rPr lang="en-US" altLang="zh-TW"/>
               <a:t>Edit Master text styles</a:t>
             </a:r>
           </a:p>
           <a:p>
             <a:pPr lvl="1"/>
             <a:r>
-              <a:rPr lang="en-US" altLang="zh-TW" smtClean="0"/>
+              <a:rPr lang="en-US" altLang="zh-TW"/>
               <a:t>Second level</a:t>
             </a:r>
           </a:p>
           <a:p>
             <a:pPr lvl="2"/>
             <a:r>
-              <a:rPr lang="en-US" altLang="zh-TW" smtClean="0"/>
+              <a:rPr lang="en-US" altLang="zh-TW"/>
               <a:t>Third level</a:t>
             </a:r>
           </a:p>
           <a:p>
             <a:pPr lvl="3"/>
             <a:r>
-              <a:rPr lang="en-US" altLang="zh-TW" smtClean="0"/>
+              <a:rPr lang="en-US" altLang="zh-TW"/>
               <a:t>Fourth level</a:t>
             </a:r>
           </a:p>
           <a:p>
             <a:pPr lvl="4"/>
             <a:r>
-              <a:rPr lang="en-US" altLang="zh-TW" smtClean="0"/>
+              <a:rPr lang="en-US" altLang="zh-TW"/>
               <a:t>Fifth level</a:t>
             </a:r>
             <a:endParaRPr lang="zh-TW" altLang="en-US"/>
@@ -463,7 +468,7 @@
           <a:p>
             <a:fld id="{5FBDD9EC-85A1-494C-B392-9A5C95C3E599}" type="datetimeFigureOut">
               <a:rPr lang="vi-VN" smtClean="0"/>
-              <a:t>30/06/2022</a:t>
+              <a:t>31/05/2025</a:t>
             </a:fld>
             <a:endParaRPr lang="vi-VN"/>
           </a:p>
@@ -562,7 +567,7 @@
           <a:lstStyle/>
           <a:p>
             <a:r>
-              <a:rPr lang="en-US" altLang="zh-TW" smtClean="0"/>
+              <a:rPr lang="en-US" altLang="zh-TW"/>
               <a:t>Click to edit Master title style</a:t>
             </a:r>
             <a:endParaRPr lang="zh-TW" altLang="en-US"/>
@@ -591,35 +596,35 @@
           <a:p>
             <a:pPr lvl="0"/>
             <a:r>
-              <a:rPr lang="en-US" altLang="zh-TW" smtClean="0"/>
+              <a:rPr lang="en-US" altLang="zh-TW"/>
               <a:t>Edit Master text styles</a:t>
             </a:r>
           </a:p>
           <a:p>
             <a:pPr lvl="1"/>
             <a:r>
-              <a:rPr lang="en-US" altLang="zh-TW" smtClean="0"/>
+              <a:rPr lang="en-US" altLang="zh-TW"/>
               <a:t>Second level</a:t>
             </a:r>
           </a:p>
           <a:p>
             <a:pPr lvl="2"/>
             <a:r>
-              <a:rPr lang="en-US" altLang="zh-TW" smtClean="0"/>
+              <a:rPr lang="en-US" altLang="zh-TW"/>
               <a:t>Third level</a:t>
             </a:r>
           </a:p>
           <a:p>
             <a:pPr lvl="3"/>
             <a:r>
-              <a:rPr lang="en-US" altLang="zh-TW" smtClean="0"/>
+              <a:rPr lang="en-US" altLang="zh-TW"/>
               <a:t>Fourth level</a:t>
             </a:r>
           </a:p>
           <a:p>
             <a:pPr lvl="4"/>
             <a:r>
-              <a:rPr lang="en-US" altLang="zh-TW" smtClean="0"/>
+              <a:rPr lang="en-US" altLang="zh-TW"/>
               <a:t>Fifth level</a:t>
             </a:r>
             <a:endParaRPr lang="zh-TW" altLang="en-US"/>
@@ -643,7 +648,7 @@
           <a:p>
             <a:fld id="{5FBDD9EC-85A1-494C-B392-9A5C95C3E599}" type="datetimeFigureOut">
               <a:rPr lang="vi-VN" smtClean="0"/>
-              <a:t>30/06/2022</a:t>
+              <a:t>31/05/2025</a:t>
             </a:fld>
             <a:endParaRPr lang="vi-VN"/>
           </a:p>
@@ -737,7 +742,7 @@
           <a:lstStyle/>
           <a:p>
             <a:r>
-              <a:rPr lang="en-US" altLang="zh-TW" smtClean="0"/>
+              <a:rPr lang="en-US" altLang="zh-TW"/>
               <a:t>Click to edit Master title style</a:t>
             </a:r>
             <a:endParaRPr lang="zh-TW" altLang="en-US"/>
@@ -761,35 +766,35 @@
           <a:p>
             <a:pPr lvl="0"/>
             <a:r>
-              <a:rPr lang="en-US" altLang="zh-TW" smtClean="0"/>
+              <a:rPr lang="en-US" altLang="zh-TW"/>
               <a:t>Edit Master text styles</a:t>
             </a:r>
           </a:p>
           <a:p>
             <a:pPr lvl="1"/>
             <a:r>
-              <a:rPr lang="en-US" altLang="zh-TW" smtClean="0"/>
+              <a:rPr lang="en-US" altLang="zh-TW"/>
               <a:t>Second level</a:t>
             </a:r>
           </a:p>
           <a:p>
             <a:pPr lvl="2"/>
             <a:r>
-              <a:rPr lang="en-US" altLang="zh-TW" smtClean="0"/>
+              <a:rPr lang="en-US" altLang="zh-TW"/>
               <a:t>Third level</a:t>
             </a:r>
           </a:p>
           <a:p>
             <a:pPr lvl="3"/>
             <a:r>
-              <a:rPr lang="en-US" altLang="zh-TW" smtClean="0"/>
+              <a:rPr lang="en-US" altLang="zh-TW"/>
               <a:t>Fourth level</a:t>
             </a:r>
           </a:p>
           <a:p>
             <a:pPr lvl="4"/>
             <a:r>
-              <a:rPr lang="en-US" altLang="zh-TW" smtClean="0"/>
+              <a:rPr lang="en-US" altLang="zh-TW"/>
               <a:t>Fifth level</a:t>
             </a:r>
             <a:endParaRPr lang="zh-TW" altLang="en-US"/>
@@ -813,7 +818,7 @@
           <a:p>
             <a:fld id="{5FBDD9EC-85A1-494C-B392-9A5C95C3E599}" type="datetimeFigureOut">
               <a:rPr lang="vi-VN" smtClean="0"/>
-              <a:t>30/06/2022</a:t>
+              <a:t>31/05/2025</a:t>
             </a:fld>
             <a:endParaRPr lang="vi-VN"/>
           </a:p>
@@ -916,7 +921,7 @@
           </a:lstStyle>
           <a:p>
             <a:r>
-              <a:rPr lang="en-US" altLang="zh-TW" smtClean="0"/>
+              <a:rPr lang="en-US" altLang="zh-TW"/>
               <a:t>Click to edit Master title style</a:t>
             </a:r>
             <a:endParaRPr lang="zh-TW" altLang="en-US"/>
@@ -1036,7 +1041,7 @@
           <a:p>
             <a:pPr lvl="0"/>
             <a:r>
-              <a:rPr lang="en-US" altLang="zh-TW" smtClean="0"/>
+              <a:rPr lang="en-US" altLang="zh-TW"/>
               <a:t>Edit Master text styles</a:t>
             </a:r>
           </a:p>
@@ -1059,7 +1064,7 @@
           <a:p>
             <a:fld id="{5FBDD9EC-85A1-494C-B392-9A5C95C3E599}" type="datetimeFigureOut">
               <a:rPr lang="vi-VN" smtClean="0"/>
-              <a:t>30/06/2022</a:t>
+              <a:t>31/05/2025</a:t>
             </a:fld>
             <a:endParaRPr lang="vi-VN"/>
           </a:p>
@@ -1153,7 +1158,7 @@
           <a:lstStyle/>
           <a:p>
             <a:r>
-              <a:rPr lang="en-US" altLang="zh-TW" smtClean="0"/>
+              <a:rPr lang="en-US" altLang="zh-TW"/>
               <a:t>Click to edit Master title style</a:t>
             </a:r>
             <a:endParaRPr lang="zh-TW" altLang="en-US"/>
@@ -1210,35 +1215,35 @@
           <a:p>
             <a:pPr lvl="0"/>
             <a:r>
-              <a:rPr lang="en-US" altLang="zh-TW" smtClean="0"/>
+              <a:rPr lang="en-US" altLang="zh-TW"/>
               <a:t>Edit Master text styles</a:t>
             </a:r>
           </a:p>
           <a:p>
             <a:pPr lvl="1"/>
             <a:r>
-              <a:rPr lang="en-US" altLang="zh-TW" smtClean="0"/>
+              <a:rPr lang="en-US" altLang="zh-TW"/>
               <a:t>Second level</a:t>
             </a:r>
           </a:p>
           <a:p>
             <a:pPr lvl="2"/>
             <a:r>
-              <a:rPr lang="en-US" altLang="zh-TW" smtClean="0"/>
+              <a:rPr lang="en-US" altLang="zh-TW"/>
               <a:t>Third level</a:t>
             </a:r>
           </a:p>
           <a:p>
             <a:pPr lvl="3"/>
             <a:r>
-              <a:rPr lang="en-US" altLang="zh-TW" smtClean="0"/>
+              <a:rPr lang="en-US" altLang="zh-TW"/>
               <a:t>Fourth level</a:t>
             </a:r>
           </a:p>
           <a:p>
             <a:pPr lvl="4"/>
             <a:r>
-              <a:rPr lang="en-US" altLang="zh-TW" smtClean="0"/>
+              <a:rPr lang="en-US" altLang="zh-TW"/>
               <a:t>Fifth level</a:t>
             </a:r>
             <a:endParaRPr lang="zh-TW" altLang="en-US"/>
@@ -1295,35 +1300,35 @@
           <a:p>
             <a:pPr lvl="0"/>
             <a:r>
-              <a:rPr lang="en-US" altLang="zh-TW" smtClean="0"/>
+              <a:rPr lang="en-US" altLang="zh-TW"/>
               <a:t>Edit Master text styles</a:t>
             </a:r>
           </a:p>
           <a:p>
             <a:pPr lvl="1"/>
             <a:r>
-              <a:rPr lang="en-US" altLang="zh-TW" smtClean="0"/>
+              <a:rPr lang="en-US" altLang="zh-TW"/>
               <a:t>Second level</a:t>
             </a:r>
           </a:p>
           <a:p>
             <a:pPr lvl="2"/>
             <a:r>
-              <a:rPr lang="en-US" altLang="zh-TW" smtClean="0"/>
+              <a:rPr lang="en-US" altLang="zh-TW"/>
               <a:t>Third level</a:t>
             </a:r>
           </a:p>
           <a:p>
             <a:pPr lvl="3"/>
             <a:r>
-              <a:rPr lang="en-US" altLang="zh-TW" smtClean="0"/>
+              <a:rPr lang="en-US" altLang="zh-TW"/>
               <a:t>Fourth level</a:t>
             </a:r>
           </a:p>
           <a:p>
             <a:pPr lvl="4"/>
             <a:r>
-              <a:rPr lang="en-US" altLang="zh-TW" smtClean="0"/>
+              <a:rPr lang="en-US" altLang="zh-TW"/>
               <a:t>Fifth level</a:t>
             </a:r>
             <a:endParaRPr lang="zh-TW" altLang="en-US"/>
@@ -1347,7 +1352,7 @@
           <a:p>
             <a:fld id="{5FBDD9EC-85A1-494C-B392-9A5C95C3E599}" type="datetimeFigureOut">
               <a:rPr lang="vi-VN" smtClean="0"/>
-              <a:t>30/06/2022</a:t>
+              <a:t>31/05/2025</a:t>
             </a:fld>
             <a:endParaRPr lang="vi-VN"/>
           </a:p>
@@ -1445,7 +1450,7 @@
           </a:lstStyle>
           <a:p>
             <a:r>
-              <a:rPr lang="en-US" altLang="zh-TW" smtClean="0"/>
+              <a:rPr lang="en-US" altLang="zh-TW"/>
               <a:t>Click to edit Master title style</a:t>
             </a:r>
             <a:endParaRPr lang="zh-TW" altLang="en-US"/>
@@ -1511,7 +1516,7 @@
           <a:p>
             <a:pPr lvl="0"/>
             <a:r>
-              <a:rPr lang="en-US" altLang="zh-TW" smtClean="0"/>
+              <a:rPr lang="en-US" altLang="zh-TW"/>
               <a:t>Edit Master text styles</a:t>
             </a:r>
           </a:p>
@@ -1567,35 +1572,35 @@
           <a:p>
             <a:pPr lvl="0"/>
             <a:r>
-              <a:rPr lang="en-US" altLang="zh-TW" smtClean="0"/>
+              <a:rPr lang="en-US" altLang="zh-TW"/>
               <a:t>Edit Master text styles</a:t>
             </a:r>
           </a:p>
           <a:p>
             <a:pPr lvl="1"/>
             <a:r>
-              <a:rPr lang="en-US" altLang="zh-TW" smtClean="0"/>
+              <a:rPr lang="en-US" altLang="zh-TW"/>
               <a:t>Second level</a:t>
             </a:r>
           </a:p>
           <a:p>
             <a:pPr lvl="2"/>
             <a:r>
-              <a:rPr lang="en-US" altLang="zh-TW" smtClean="0"/>
+              <a:rPr lang="en-US" altLang="zh-TW"/>
               <a:t>Third level</a:t>
             </a:r>
           </a:p>
           <a:p>
             <a:pPr lvl="3"/>
             <a:r>
-              <a:rPr lang="en-US" altLang="zh-TW" smtClean="0"/>
+              <a:rPr lang="en-US" altLang="zh-TW"/>
               <a:t>Fourth level</a:t>
             </a:r>
           </a:p>
           <a:p>
             <a:pPr lvl="4"/>
             <a:r>
-              <a:rPr lang="en-US" altLang="zh-TW" smtClean="0"/>
+              <a:rPr lang="en-US" altLang="zh-TW"/>
               <a:t>Fifth level</a:t>
             </a:r>
             <a:endParaRPr lang="zh-TW" altLang="en-US"/>
@@ -1661,7 +1666,7 @@
           <a:p>
             <a:pPr lvl="0"/>
             <a:r>
-              <a:rPr lang="en-US" altLang="zh-TW" smtClean="0"/>
+              <a:rPr lang="en-US" altLang="zh-TW"/>
               <a:t>Edit Master text styles</a:t>
             </a:r>
           </a:p>
@@ -1717,35 +1722,35 @@
           <a:p>
             <a:pPr lvl="0"/>
             <a:r>
-              <a:rPr lang="en-US" altLang="zh-TW" smtClean="0"/>
+              <a:rPr lang="en-US" altLang="zh-TW"/>
               <a:t>Edit Master text styles</a:t>
             </a:r>
           </a:p>
           <a:p>
             <a:pPr lvl="1"/>
             <a:r>
-              <a:rPr lang="en-US" altLang="zh-TW" smtClean="0"/>
+              <a:rPr lang="en-US" altLang="zh-TW"/>
               <a:t>Second level</a:t>
             </a:r>
           </a:p>
           <a:p>
             <a:pPr lvl="2"/>
             <a:r>
-              <a:rPr lang="en-US" altLang="zh-TW" smtClean="0"/>
+              <a:rPr lang="en-US" altLang="zh-TW"/>
               <a:t>Third level</a:t>
             </a:r>
           </a:p>
           <a:p>
             <a:pPr lvl="3"/>
             <a:r>
-              <a:rPr lang="en-US" altLang="zh-TW" smtClean="0"/>
+              <a:rPr lang="en-US" altLang="zh-TW"/>
               <a:t>Fourth level</a:t>
             </a:r>
           </a:p>
           <a:p>
             <a:pPr lvl="4"/>
             <a:r>
-              <a:rPr lang="en-US" altLang="zh-TW" smtClean="0"/>
+              <a:rPr lang="en-US" altLang="zh-TW"/>
               <a:t>Fifth level</a:t>
             </a:r>
             <a:endParaRPr lang="zh-TW" altLang="en-US"/>
@@ -1769,7 +1774,7 @@
           <a:p>
             <a:fld id="{5FBDD9EC-85A1-494C-B392-9A5C95C3E599}" type="datetimeFigureOut">
               <a:rPr lang="vi-VN" smtClean="0"/>
-              <a:t>30/06/2022</a:t>
+              <a:t>31/05/2025</a:t>
             </a:fld>
             <a:endParaRPr lang="vi-VN"/>
           </a:p>
@@ -1863,7 +1868,7 @@
           <a:lstStyle/>
           <a:p>
             <a:r>
-              <a:rPr lang="en-US" altLang="zh-TW" smtClean="0"/>
+              <a:rPr lang="en-US" altLang="zh-TW"/>
               <a:t>Click to edit Master title style</a:t>
             </a:r>
             <a:endParaRPr lang="zh-TW" altLang="en-US"/>
@@ -1887,7 +1892,7 @@
           <a:p>
             <a:fld id="{5FBDD9EC-85A1-494C-B392-9A5C95C3E599}" type="datetimeFigureOut">
               <a:rPr lang="vi-VN" smtClean="0"/>
-              <a:t>30/06/2022</a:t>
+              <a:t>31/05/2025</a:t>
             </a:fld>
             <a:endParaRPr lang="vi-VN"/>
           </a:p>
@@ -1982,7 +1987,7 @@
           <a:p>
             <a:fld id="{5FBDD9EC-85A1-494C-B392-9A5C95C3E599}" type="datetimeFigureOut">
               <a:rPr lang="vi-VN" smtClean="0"/>
-              <a:t>30/06/2022</a:t>
+              <a:t>31/05/2025</a:t>
             </a:fld>
             <a:endParaRPr lang="vi-VN"/>
           </a:p>
@@ -2085,7 +2090,7 @@
           </a:lstStyle>
           <a:p>
             <a:r>
-              <a:rPr lang="en-US" altLang="zh-TW" smtClean="0"/>
+              <a:rPr lang="en-US" altLang="zh-TW"/>
               <a:t>Click to edit Master title style</a:t>
             </a:r>
             <a:endParaRPr lang="zh-TW" altLang="en-US"/>
@@ -2142,35 +2147,35 @@
           <a:p>
             <a:pPr lvl="0"/>
             <a:r>
-              <a:rPr lang="en-US" altLang="zh-TW" smtClean="0"/>
+              <a:rPr lang="en-US" altLang="zh-TW"/>
               <a:t>Edit Master text styles</a:t>
             </a:r>
           </a:p>
           <a:p>
             <a:pPr lvl="1"/>
             <a:r>
-              <a:rPr lang="en-US" altLang="zh-TW" smtClean="0"/>
+              <a:rPr lang="en-US" altLang="zh-TW"/>
               <a:t>Second level</a:t>
             </a:r>
           </a:p>
           <a:p>
             <a:pPr lvl="2"/>
             <a:r>
-              <a:rPr lang="en-US" altLang="zh-TW" smtClean="0"/>
+              <a:rPr lang="en-US" altLang="zh-TW"/>
               <a:t>Third level</a:t>
             </a:r>
           </a:p>
           <a:p>
             <a:pPr lvl="3"/>
             <a:r>
-              <a:rPr lang="en-US" altLang="zh-TW" smtClean="0"/>
+              <a:rPr lang="en-US" altLang="zh-TW"/>
               <a:t>Fourth level</a:t>
             </a:r>
           </a:p>
           <a:p>
             <a:pPr lvl="4"/>
             <a:r>
-              <a:rPr lang="en-US" altLang="zh-TW" smtClean="0"/>
+              <a:rPr lang="en-US" altLang="zh-TW"/>
               <a:t>Fifth level</a:t>
             </a:r>
             <a:endParaRPr lang="zh-TW" altLang="en-US"/>
@@ -2236,7 +2241,7 @@
           <a:p>
             <a:pPr lvl="0"/>
             <a:r>
-              <a:rPr lang="en-US" altLang="zh-TW" smtClean="0"/>
+              <a:rPr lang="en-US" altLang="zh-TW"/>
               <a:t>Edit Master text styles</a:t>
             </a:r>
           </a:p>
@@ -2259,7 +2264,7 @@
           <a:p>
             <a:fld id="{5FBDD9EC-85A1-494C-B392-9A5C95C3E599}" type="datetimeFigureOut">
               <a:rPr lang="vi-VN" smtClean="0"/>
-              <a:t>30/06/2022</a:t>
+              <a:t>31/05/2025</a:t>
             </a:fld>
             <a:endParaRPr lang="vi-VN"/>
           </a:p>
@@ -2362,7 +2367,7 @@
           </a:lstStyle>
           <a:p>
             <a:r>
-              <a:rPr lang="en-US" altLang="zh-TW" smtClean="0"/>
+              <a:rPr lang="en-US" altLang="zh-TW"/>
               <a:t>Click to edit Master title style</a:t>
             </a:r>
             <a:endParaRPr lang="zh-TW" altLang="en-US"/>
@@ -2427,7 +2432,7 @@
           </a:lstStyle>
           <a:p>
             <a:r>
-              <a:rPr lang="en-US" altLang="zh-TW" smtClean="0"/>
+              <a:rPr lang="en-US" altLang="zh-TW"/>
               <a:t>Click icon to add picture</a:t>
             </a:r>
             <a:endParaRPr lang="zh-TW" altLang="en-US"/>
@@ -2493,7 +2498,7 @@
           <a:p>
             <a:pPr lvl="0"/>
             <a:r>
-              <a:rPr lang="en-US" altLang="zh-TW" smtClean="0"/>
+              <a:rPr lang="en-US" altLang="zh-TW"/>
               <a:t>Edit Master text styles</a:t>
             </a:r>
           </a:p>
@@ -2516,7 +2521,7 @@
           <a:p>
             <a:fld id="{5FBDD9EC-85A1-494C-B392-9A5C95C3E599}" type="datetimeFigureOut">
               <a:rPr lang="vi-VN" smtClean="0"/>
-              <a:t>30/06/2022</a:t>
+              <a:t>31/05/2025</a:t>
             </a:fld>
             <a:endParaRPr lang="vi-VN"/>
           </a:p>
@@ -2630,10 +2635,9 @@
           <a:lstStyle/>
           <a:p>
             <a:r>
-              <a:rPr lang="zh-TW" altLang="en-US" smtClean="0"/>
+              <a:rPr lang="zh-TW" altLang="en-US"/>
               <a:t>按一下以編輯母片標題樣式</a:t>
             </a:r>
-            <a:endParaRPr lang="zh-TW" altLang="en-US"/>
           </a:p>
         </p:txBody>
       </p:sp>
@@ -2664,38 +2668,37 @@
           <a:p>
             <a:pPr lvl="0"/>
             <a:r>
-              <a:rPr lang="zh-TW" altLang="en-US" smtClean="0"/>
+              <a:rPr lang="zh-TW" altLang="en-US"/>
               <a:t>按一下以編輯母片文字樣式</a:t>
             </a:r>
           </a:p>
           <a:p>
             <a:pPr lvl="1"/>
             <a:r>
-              <a:rPr lang="zh-TW" altLang="en-US" smtClean="0"/>
+              <a:rPr lang="zh-TW" altLang="en-US"/>
               <a:t>第二層</a:t>
             </a:r>
           </a:p>
           <a:p>
             <a:pPr lvl="2"/>
             <a:r>
-              <a:rPr lang="zh-TW" altLang="en-US" smtClean="0"/>
+              <a:rPr lang="zh-TW" altLang="en-US"/>
               <a:t>第三層</a:t>
             </a:r>
           </a:p>
           <a:p>
             <a:pPr lvl="3"/>
             <a:r>
-              <a:rPr lang="zh-TW" altLang="en-US" smtClean="0"/>
+              <a:rPr lang="zh-TW" altLang="en-US"/>
               <a:t>第四層</a:t>
             </a:r>
           </a:p>
           <a:p>
             <a:pPr lvl="4"/>
             <a:r>
-              <a:rPr lang="zh-TW" altLang="en-US" smtClean="0"/>
+              <a:rPr lang="zh-TW" altLang="en-US"/>
               <a:t>第五層</a:t>
             </a:r>
-            <a:endParaRPr lang="zh-TW" altLang="en-US"/>
           </a:p>
         </p:txBody>
       </p:sp>
@@ -2734,7 +2737,7 @@
           <a:p>
             <a:fld id="{5FBDD9EC-85A1-494C-B392-9A5C95C3E599}" type="datetimeFigureOut">
               <a:rPr lang="vi-VN" smtClean="0"/>
-              <a:t>30/06/2022</a:t>
+              <a:t>31/05/2025</a:t>
             </a:fld>
             <a:endParaRPr lang="vi-VN"/>
           </a:p>
@@ -3132,7 +3135,7 @@
           <a:lstStyle/>
           <a:p>
             <a:r>
-              <a:rPr lang="zh-CN" altLang="en-US" sz="7200" b="1" i="1" dirty="0" smtClean="0">
+              <a:rPr lang="zh-CN" altLang="en-US" sz="7200" b="1" i="1" dirty="0">
                 <a:solidFill>
                   <a:srgbClr val="660033"/>
                 </a:solidFill>
@@ -3146,24 +3149,7 @@
                 <a:latin typeface="微軟正黑體" pitchFamily="34" charset="-120"/>
                 <a:ea typeface="微軟正黑體" pitchFamily="34" charset="-120"/>
               </a:rPr>
-              <a:t>十</a:t>
-            </a:r>
-            <a:r>
-              <a:rPr lang="zh-CN" altLang="en-US" sz="7200" b="1" i="1" dirty="0">
-                <a:solidFill>
-                  <a:srgbClr val="660033"/>
-                </a:solidFill>
-                <a:effectLst>
-                  <a:outerShdw blurRad="38100" dist="38100" dir="2700000" algn="tl">
-                    <a:srgbClr val="000000">
-                      <a:alpha val="43137"/>
-                    </a:srgbClr>
-                  </a:outerShdw>
-                </a:effectLst>
-                <a:latin typeface="微軟正黑體" pitchFamily="34" charset="-120"/>
-                <a:ea typeface="微軟正黑體" pitchFamily="34" charset="-120"/>
-              </a:rPr>
-              <a:t>字架</a:t>
+              <a:t>十字架</a:t>
             </a:r>
           </a:p>
         </p:txBody>
@@ -3224,46 +3210,16 @@
               <a:buNone/>
             </a:pPr>
             <a:r>
-              <a:rPr lang="zh-TW" altLang="en-US" sz="6400" b="1" dirty="0" smtClean="0">
+              <a:rPr lang="zh-TW" altLang="en-US" sz="6400" b="1" dirty="0">
                 <a:solidFill>
                   <a:srgbClr val="660033"/>
                 </a:solidFill>
                 <a:latin typeface="微軟正黑體" pitchFamily="34" charset="-120"/>
                 <a:ea typeface="微軟正黑體" pitchFamily="34" charset="-120"/>
               </a:rPr>
-              <a:t>耶</a:t>
-            </a:r>
-            <a:r>
-              <a:rPr lang="zh-TW" altLang="en-US" sz="6400" b="1" dirty="0">
-                <a:solidFill>
-                  <a:srgbClr val="660033"/>
-                </a:solidFill>
-                <a:latin typeface="微軟正黑體" pitchFamily="34" charset="-120"/>
-                <a:ea typeface="微軟正黑體" pitchFamily="34" charset="-120"/>
-              </a:rPr>
-              <a:t>穌背負十</a:t>
-            </a:r>
-            <a:r>
-              <a:rPr lang="zh-TW" altLang="en-US" sz="6400" b="1" dirty="0" smtClean="0">
-                <a:solidFill>
-                  <a:srgbClr val="660033"/>
-                </a:solidFill>
-                <a:latin typeface="微軟正黑體" pitchFamily="34" charset="-120"/>
-                <a:ea typeface="微軟正黑體" pitchFamily="34" charset="-120"/>
-              </a:rPr>
-              <a:t>架  為</a:t>
-            </a:r>
-            <a:r>
-              <a:rPr lang="zh-TW" altLang="en-US" sz="6400" b="1" dirty="0">
-                <a:solidFill>
-                  <a:srgbClr val="660033"/>
-                </a:solidFill>
-                <a:latin typeface="微軟正黑體" pitchFamily="34" charset="-120"/>
-                <a:ea typeface="微軟正黑體" pitchFamily="34" charset="-120"/>
-              </a:rPr>
-              <a:t>我擔當過犯　</a:t>
-            </a:r>
-            <a:endParaRPr lang="en-US" altLang="zh-TW" sz="6400" b="1" dirty="0" smtClean="0">
+              <a:t>耶穌背負十架  為我擔當過犯　</a:t>
+            </a:r>
+            <a:endParaRPr lang="en-US" altLang="zh-TW" sz="6400" b="1" dirty="0">
               <a:solidFill>
                 <a:srgbClr val="660033"/>
               </a:solidFill>
@@ -3276,24 +3232,14 @@
               <a:buNone/>
             </a:pPr>
             <a:r>
-              <a:rPr lang="zh-TW" altLang="en-US" sz="6400" b="1" dirty="0" smtClean="0">
+              <a:rPr lang="zh-TW" altLang="en-US" sz="6400" b="1" dirty="0">
                 <a:solidFill>
                   <a:srgbClr val="660033"/>
                 </a:solidFill>
                 <a:latin typeface="微軟正黑體" pitchFamily="34" charset="-120"/>
                 <a:ea typeface="微軟正黑體" pitchFamily="34" charset="-120"/>
               </a:rPr>
-              <a:t>毫</a:t>
-            </a:r>
-            <a:r>
-              <a:rPr lang="zh-TW" altLang="en-US" sz="6400" b="1" dirty="0">
-                <a:solidFill>
-                  <a:srgbClr val="660033"/>
-                </a:solidFill>
-                <a:latin typeface="微軟正黑體" pitchFamily="34" charset="-120"/>
-                <a:ea typeface="微軟正黑體" pitchFamily="34" charset="-120"/>
-              </a:rPr>
-              <a:t>無保留為我捨命在十架上</a:t>
+              <a:t>毫無保留為我捨命在十架上</a:t>
             </a:r>
             <a:endParaRPr lang="en-US" altLang="zh-TW" sz="6400" b="1" dirty="0">
               <a:solidFill>
@@ -3346,7 +3292,7 @@
                 <a:latin typeface="Microsoft JhengHei" panose="020B0604030504040204" pitchFamily="34" charset="-120"/>
                 <a:ea typeface="Microsoft JhengHei" panose="020B0604030504040204" pitchFamily="34" charset="-120"/>
               </a:rPr>
-              <a:t>正</a:t>
+              <a:t>正歌</a:t>
             </a:r>
             <a:r>
               <a:rPr lang="en-US" sz="4267" b="1" dirty="0">
@@ -3430,37 +3376,7 @@
                 <a:latin typeface="微軟正黑體" pitchFamily="34" charset="-120"/>
                 <a:ea typeface="微軟正黑體" pitchFamily="34" charset="-120"/>
               </a:rPr>
-              <a:t>祢受鞭</a:t>
-            </a:r>
-            <a:r>
-              <a:rPr lang="zh-TW" altLang="en-US" sz="6400" b="1" dirty="0">
-                <a:solidFill>
-                  <a:srgbClr val="660033"/>
-                </a:solidFill>
-                <a:latin typeface="微軟正黑體" pitchFamily="34" charset="-120"/>
-                <a:ea typeface="微軟正黑體" pitchFamily="34" charset="-120"/>
-              </a:rPr>
-              <a:t>傷  我</a:t>
-            </a:r>
-            <a:r>
-              <a:rPr lang="zh-TW" altLang="en-US" sz="6400" b="1" dirty="0">
-                <a:solidFill>
-                  <a:srgbClr val="660033"/>
-                </a:solidFill>
-                <a:latin typeface="微軟正黑體" pitchFamily="34" charset="-120"/>
-                <a:ea typeface="微軟正黑體" pitchFamily="34" charset="-120"/>
-              </a:rPr>
-              <a:t>得醫</a:t>
-            </a:r>
-            <a:r>
-              <a:rPr lang="zh-TW" altLang="en-US" sz="6400" b="1" dirty="0">
-                <a:solidFill>
-                  <a:srgbClr val="660033"/>
-                </a:solidFill>
-                <a:latin typeface="微軟正黑體" pitchFamily="34" charset="-120"/>
-                <a:ea typeface="微軟正黑體" pitchFamily="34" charset="-120"/>
-              </a:rPr>
-              <a:t>治</a:t>
+              <a:t>祢受鞭傷  我得醫治</a:t>
             </a:r>
             <a:endParaRPr lang="en-US" altLang="zh-TW" sz="6400" b="1" dirty="0">
               <a:solidFill>
@@ -3482,37 +3398,7 @@
                 <a:latin typeface="微軟正黑體" pitchFamily="34" charset="-120"/>
                 <a:ea typeface="微軟正黑體" pitchFamily="34" charset="-120"/>
               </a:rPr>
-              <a:t>祢</a:t>
-            </a:r>
-            <a:r>
-              <a:rPr lang="zh-TW" altLang="en-US" sz="6400" b="1" dirty="0">
-                <a:solidFill>
-                  <a:srgbClr val="660033"/>
-                </a:solidFill>
-                <a:latin typeface="微軟正黑體" pitchFamily="34" charset="-120"/>
-                <a:ea typeface="微軟正黑體" pitchFamily="34" charset="-120"/>
-              </a:rPr>
-              <a:t>受刑</a:t>
-            </a:r>
-            <a:r>
-              <a:rPr lang="zh-TW" altLang="en-US" sz="6400" b="1" dirty="0">
-                <a:solidFill>
-                  <a:srgbClr val="660033"/>
-                </a:solidFill>
-                <a:latin typeface="微軟正黑體" pitchFamily="34" charset="-120"/>
-                <a:ea typeface="微軟正黑體" pitchFamily="34" charset="-120"/>
-              </a:rPr>
-              <a:t>罰  我</a:t>
-            </a:r>
-            <a:r>
-              <a:rPr lang="zh-TW" altLang="en-US" sz="6400" b="1" dirty="0">
-                <a:solidFill>
-                  <a:srgbClr val="660033"/>
-                </a:solidFill>
-                <a:latin typeface="微軟正黑體" pitchFamily="34" charset="-120"/>
-                <a:ea typeface="微軟正黑體" pitchFamily="34" charset="-120"/>
-              </a:rPr>
-              <a:t>得自由釋放</a:t>
+              <a:t>祢受刑罰  我得自由釋放</a:t>
             </a:r>
             <a:endParaRPr lang="en-US" altLang="zh-TW" sz="6400" b="1" dirty="0">
               <a:solidFill>
@@ -3565,7 +3451,7 @@
                 <a:latin typeface="Microsoft JhengHei" panose="020B0604030504040204" pitchFamily="34" charset="-120"/>
                 <a:ea typeface="Microsoft JhengHei" panose="020B0604030504040204" pitchFamily="34" charset="-120"/>
               </a:rPr>
-              <a:t>正</a:t>
+              <a:t>正歌</a:t>
             </a:r>
             <a:r>
               <a:rPr lang="en-US" sz="4267" b="1" dirty="0">
@@ -3642,64 +3528,14 @@
               <a:buNone/>
             </a:pPr>
             <a:r>
-              <a:rPr lang="zh-TW" altLang="en-US" sz="6400" b="1" dirty="0" smtClean="0">
+              <a:rPr lang="zh-TW" altLang="en-US" sz="6400" b="1" dirty="0">
                 <a:solidFill>
                   <a:srgbClr val="660033"/>
                 </a:solidFill>
                 <a:latin typeface="微軟正黑體" pitchFamily="34" charset="-120"/>
                 <a:ea typeface="微軟正黑體" pitchFamily="34" charset="-120"/>
               </a:rPr>
-              <a:t>十</a:t>
-            </a:r>
-            <a:r>
-              <a:rPr lang="zh-TW" altLang="en-US" sz="6400" b="1" dirty="0">
-                <a:solidFill>
-                  <a:srgbClr val="660033"/>
-                </a:solidFill>
-                <a:latin typeface="微軟正黑體" pitchFamily="34" charset="-120"/>
-                <a:ea typeface="微軟正黑體" pitchFamily="34" charset="-120"/>
-              </a:rPr>
-              <a:t>字</a:t>
-            </a:r>
-            <a:r>
-              <a:rPr lang="zh-TW" altLang="en-US" sz="6400" b="1" dirty="0" smtClean="0">
-                <a:solidFill>
-                  <a:srgbClr val="660033"/>
-                </a:solidFill>
-                <a:latin typeface="微軟正黑體" pitchFamily="34" charset="-120"/>
-                <a:ea typeface="微軟正黑體" pitchFamily="34" charset="-120"/>
-              </a:rPr>
-              <a:t>架  十</a:t>
-            </a:r>
-            <a:r>
-              <a:rPr lang="zh-TW" altLang="en-US" sz="6400" b="1" dirty="0">
-                <a:solidFill>
-                  <a:srgbClr val="660033"/>
-                </a:solidFill>
-                <a:latin typeface="微軟正黑體" pitchFamily="34" charset="-120"/>
-                <a:ea typeface="微軟正黑體" pitchFamily="34" charset="-120"/>
-              </a:rPr>
-              <a:t>字</a:t>
-            </a:r>
-            <a:r>
-              <a:rPr lang="zh-TW" altLang="en-US" sz="6400" b="1" dirty="0" smtClean="0">
-                <a:solidFill>
-                  <a:srgbClr val="660033"/>
-                </a:solidFill>
-                <a:latin typeface="微軟正黑體" pitchFamily="34" charset="-120"/>
-                <a:ea typeface="微軟正黑體" pitchFamily="34" charset="-120"/>
-              </a:rPr>
-              <a:t>架  耶</a:t>
-            </a:r>
-            <a:r>
-              <a:rPr lang="zh-TW" altLang="en-US" sz="6400" b="1" dirty="0">
-                <a:solidFill>
-                  <a:srgbClr val="660033"/>
-                </a:solidFill>
-                <a:latin typeface="微軟正黑體" pitchFamily="34" charset="-120"/>
-                <a:ea typeface="微軟正黑體" pitchFamily="34" charset="-120"/>
-              </a:rPr>
-              <a:t>穌以愛覆蓋我　</a:t>
+              <a:t>十字架  十字架  耶穌以愛覆蓋我　</a:t>
             </a:r>
             <a:endParaRPr lang="en-US" altLang="zh-TW" sz="6400" b="1" dirty="0">
               <a:solidFill>
@@ -3714,64 +3550,14 @@
               <a:buNone/>
             </a:pPr>
             <a:r>
-              <a:rPr lang="zh-TW" altLang="en-US" sz="6400" b="1" dirty="0" smtClean="0">
+              <a:rPr lang="zh-TW" altLang="en-US" sz="6400" b="1" dirty="0">
                 <a:solidFill>
                   <a:srgbClr val="660033"/>
                 </a:solidFill>
                 <a:latin typeface="微軟正黑體" pitchFamily="34" charset="-120"/>
                 <a:ea typeface="微軟正黑體" pitchFamily="34" charset="-120"/>
               </a:rPr>
-              <a:t>十</a:t>
-            </a:r>
-            <a:r>
-              <a:rPr lang="zh-TW" altLang="en-US" sz="6400" b="1" dirty="0">
-                <a:solidFill>
-                  <a:srgbClr val="660033"/>
-                </a:solidFill>
-                <a:latin typeface="微軟正黑體" pitchFamily="34" charset="-120"/>
-                <a:ea typeface="微軟正黑體" pitchFamily="34" charset="-120"/>
-              </a:rPr>
-              <a:t>字</a:t>
-            </a:r>
-            <a:r>
-              <a:rPr lang="zh-TW" altLang="en-US" sz="6400" b="1" dirty="0" smtClean="0">
-                <a:solidFill>
-                  <a:srgbClr val="660033"/>
-                </a:solidFill>
-                <a:latin typeface="微軟正黑體" pitchFamily="34" charset="-120"/>
-                <a:ea typeface="微軟正黑體" pitchFamily="34" charset="-120"/>
-              </a:rPr>
-              <a:t>架  十</a:t>
-            </a:r>
-            <a:r>
-              <a:rPr lang="zh-TW" altLang="en-US" sz="6400" b="1" dirty="0">
-                <a:solidFill>
-                  <a:srgbClr val="660033"/>
-                </a:solidFill>
-                <a:latin typeface="微軟正黑體" pitchFamily="34" charset="-120"/>
-                <a:ea typeface="微軟正黑體" pitchFamily="34" charset="-120"/>
-              </a:rPr>
-              <a:t>字</a:t>
-            </a:r>
-            <a:r>
-              <a:rPr lang="zh-TW" altLang="en-US" sz="6400" b="1" dirty="0" smtClean="0">
-                <a:solidFill>
-                  <a:srgbClr val="660033"/>
-                </a:solidFill>
-                <a:latin typeface="微軟正黑體" pitchFamily="34" charset="-120"/>
-                <a:ea typeface="微軟正黑體" pitchFamily="34" charset="-120"/>
-              </a:rPr>
-              <a:t>架  祢</a:t>
-            </a:r>
-            <a:r>
-              <a:rPr lang="zh-TW" altLang="en-US" sz="6400" b="1" dirty="0">
-                <a:solidFill>
-                  <a:srgbClr val="660033"/>
-                </a:solidFill>
-                <a:latin typeface="微軟正黑體" pitchFamily="34" charset="-120"/>
-                <a:ea typeface="微軟正黑體" pitchFamily="34" charset="-120"/>
-              </a:rPr>
-              <a:t>寶血為我流下</a:t>
+              <a:t>十字架  十字架  祢寶血為我流下</a:t>
             </a:r>
             <a:endParaRPr lang="en-US" altLang="zh-TW" sz="6400" b="1" dirty="0">
               <a:solidFill>
@@ -3817,34 +3603,24 @@
               <a:t>( </a:t>
             </a:r>
             <a:r>
-              <a:rPr lang="zh-CN" altLang="en-US" sz="4267" b="1" dirty="0" smtClean="0">
+              <a:rPr lang="zh-CN" altLang="en-US" sz="4267" b="1" dirty="0">
                 <a:solidFill>
                   <a:srgbClr val="660033"/>
                 </a:solidFill>
                 <a:latin typeface="Microsoft JhengHei" panose="020B0604030504040204" pitchFamily="34" charset="-120"/>
                 <a:ea typeface="Microsoft JhengHei" panose="020B0604030504040204" pitchFamily="34" charset="-120"/>
               </a:rPr>
-              <a:t>副</a:t>
-            </a:r>
-            <a:r>
-              <a:rPr lang="en-US" sz="4267" b="1" dirty="0" smtClean="0">
+              <a:t>副歌</a:t>
+            </a:r>
+            <a:r>
+              <a:rPr lang="en-US" sz="4267" b="1" dirty="0">
                 <a:solidFill>
                   <a:srgbClr val="660033"/>
                 </a:solidFill>
                 <a:latin typeface="Microsoft JhengHei" panose="020B0604030504040204" pitchFamily="34" charset="-120"/>
                 <a:ea typeface="Microsoft JhengHei" panose="020B0604030504040204" pitchFamily="34" charset="-120"/>
               </a:rPr>
-              <a:t> </a:t>
-            </a:r>
-            <a:r>
-              <a:rPr lang="en-US" sz="4267" b="1" dirty="0">
-                <a:solidFill>
-                  <a:srgbClr val="660033"/>
-                </a:solidFill>
-                <a:latin typeface="Microsoft JhengHei" panose="020B0604030504040204" pitchFamily="34" charset="-120"/>
-                <a:ea typeface="Microsoft JhengHei" panose="020B0604030504040204" pitchFamily="34" charset="-120"/>
-              </a:rPr>
-              <a:t>)</a:t>
+              <a:t> )</a:t>
             </a:r>
             <a:endParaRPr lang="vi-VN" sz="4267" b="1" dirty="0">
               <a:solidFill>
@@ -3918,57 +3694,7 @@
                 <a:latin typeface="微軟正黑體" pitchFamily="34" charset="-120"/>
                 <a:ea typeface="微軟正黑體" pitchFamily="34" charset="-120"/>
               </a:rPr>
-              <a:t>十字</a:t>
-            </a:r>
-            <a:r>
-              <a:rPr lang="zh-TW" altLang="en-US" sz="6400" b="1" dirty="0">
-                <a:solidFill>
-                  <a:srgbClr val="660033"/>
-                </a:solidFill>
-                <a:latin typeface="微軟正黑體" pitchFamily="34" charset="-120"/>
-                <a:ea typeface="微軟正黑體" pitchFamily="34" charset="-120"/>
-              </a:rPr>
-              <a:t>架  十</a:t>
-            </a:r>
-            <a:r>
-              <a:rPr lang="zh-TW" altLang="en-US" sz="6400" b="1" dirty="0">
-                <a:solidFill>
-                  <a:srgbClr val="660033"/>
-                </a:solidFill>
-                <a:latin typeface="微軟正黑體" pitchFamily="34" charset="-120"/>
-                <a:ea typeface="微軟正黑體" pitchFamily="34" charset="-120"/>
-              </a:rPr>
-              <a:t>字</a:t>
-            </a:r>
-            <a:r>
-              <a:rPr lang="zh-TW" altLang="en-US" sz="6400" b="1" dirty="0">
-                <a:solidFill>
-                  <a:srgbClr val="660033"/>
-                </a:solidFill>
-                <a:latin typeface="微軟正黑體" pitchFamily="34" charset="-120"/>
-                <a:ea typeface="微軟正黑體" pitchFamily="34" charset="-120"/>
-              </a:rPr>
-              <a:t>架  我</a:t>
-            </a:r>
-            <a:r>
-              <a:rPr lang="zh-TW" altLang="en-US" sz="6400" b="1" dirty="0">
-                <a:solidFill>
-                  <a:srgbClr val="660033"/>
-                </a:solidFill>
-                <a:latin typeface="微軟正黑體" pitchFamily="34" charset="-120"/>
-                <a:ea typeface="微軟正黑體" pitchFamily="34" charset="-120"/>
-              </a:rPr>
-              <a:t>得救贖的記</a:t>
-            </a:r>
-            <a:r>
-              <a:rPr lang="zh-TW" altLang="en-US" sz="6400" b="1" dirty="0">
-                <a:solidFill>
-                  <a:srgbClr val="660033"/>
-                </a:solidFill>
-                <a:latin typeface="微軟正黑體" pitchFamily="34" charset="-120"/>
-                <a:ea typeface="微軟正黑體" pitchFamily="34" charset="-120"/>
-              </a:rPr>
-              <a:t>號</a:t>
+              <a:t>十字架  十字架  我得救贖的記號</a:t>
             </a:r>
             <a:endParaRPr lang="en-US" altLang="zh-TW" sz="6400" b="1" dirty="0">
               <a:solidFill>
@@ -3990,67 +3716,7 @@
                 <a:latin typeface="微軟正黑體" pitchFamily="34" charset="-120"/>
                 <a:ea typeface="微軟正黑體" pitchFamily="34" charset="-120"/>
               </a:rPr>
-              <a:t>十</a:t>
-            </a:r>
-            <a:r>
-              <a:rPr lang="zh-TW" altLang="en-US" sz="6400" b="1" dirty="0">
-                <a:solidFill>
-                  <a:srgbClr val="660033"/>
-                </a:solidFill>
-                <a:latin typeface="微軟正黑體" pitchFamily="34" charset="-120"/>
-                <a:ea typeface="微軟正黑體" pitchFamily="34" charset="-120"/>
-              </a:rPr>
-              <a:t>字</a:t>
-            </a:r>
-            <a:r>
-              <a:rPr lang="zh-TW" altLang="en-US" sz="6400" b="1" dirty="0">
-                <a:solidFill>
-                  <a:srgbClr val="660033"/>
-                </a:solidFill>
-                <a:latin typeface="微軟正黑體" pitchFamily="34" charset="-120"/>
-                <a:ea typeface="微軟正黑體" pitchFamily="34" charset="-120"/>
-              </a:rPr>
-              <a:t>架  十</a:t>
-            </a:r>
-            <a:r>
-              <a:rPr lang="zh-TW" altLang="en-US" sz="6400" b="1" dirty="0">
-                <a:solidFill>
-                  <a:srgbClr val="660033"/>
-                </a:solidFill>
-                <a:latin typeface="微軟正黑體" pitchFamily="34" charset="-120"/>
-                <a:ea typeface="微軟正黑體" pitchFamily="34" charset="-120"/>
-              </a:rPr>
-              <a:t>字</a:t>
-            </a:r>
-            <a:r>
-              <a:rPr lang="zh-TW" altLang="en-US" sz="6400" b="1" dirty="0">
-                <a:solidFill>
-                  <a:srgbClr val="660033"/>
-                </a:solidFill>
-                <a:latin typeface="微軟正黑體" pitchFamily="34" charset="-120"/>
-                <a:ea typeface="微軟正黑體" pitchFamily="34" charset="-120"/>
-              </a:rPr>
-              <a:t>架  是</a:t>
-            </a:r>
-            <a:r>
-              <a:rPr lang="zh-TW" altLang="en-US" sz="6400" b="1" dirty="0">
-                <a:solidFill>
-                  <a:srgbClr val="660033"/>
-                </a:solidFill>
-                <a:latin typeface="微軟正黑體" pitchFamily="34" charset="-120"/>
-                <a:ea typeface="微軟正黑體" pitchFamily="34" charset="-120"/>
-              </a:rPr>
-              <a:t>我永遠的榮</a:t>
-            </a:r>
-            <a:r>
-              <a:rPr lang="zh-TW" altLang="en-US" sz="6400" b="1" dirty="0" smtClean="0">
-                <a:solidFill>
-                  <a:srgbClr val="660033"/>
-                </a:solidFill>
-                <a:latin typeface="微軟正黑體" pitchFamily="34" charset="-120"/>
-                <a:ea typeface="微軟正黑體" pitchFamily="34" charset="-120"/>
-              </a:rPr>
-              <a:t>耀</a:t>
+              <a:t>十字架  十字架  是我永遠的榮耀</a:t>
             </a:r>
             <a:endParaRPr lang="en-US" altLang="zh-TW" sz="6400" b="1" dirty="0">
               <a:solidFill>
@@ -4096,34 +3762,24 @@
               <a:t>( </a:t>
             </a:r>
             <a:r>
-              <a:rPr lang="zh-CN" altLang="en-US" sz="4267" b="1" dirty="0" smtClean="0">
+              <a:rPr lang="zh-CN" altLang="en-US" sz="4267" b="1" dirty="0">
                 <a:solidFill>
                   <a:srgbClr val="660033"/>
                 </a:solidFill>
                 <a:latin typeface="Microsoft JhengHei" panose="020B0604030504040204" pitchFamily="34" charset="-120"/>
                 <a:ea typeface="Microsoft JhengHei" panose="020B0604030504040204" pitchFamily="34" charset="-120"/>
               </a:rPr>
-              <a:t>副</a:t>
-            </a:r>
-            <a:r>
-              <a:rPr lang="en-US" sz="4267" b="1" dirty="0" smtClean="0">
+              <a:t>副歌</a:t>
+            </a:r>
+            <a:r>
+              <a:rPr lang="en-US" sz="4267" b="1" dirty="0">
                 <a:solidFill>
                   <a:srgbClr val="660033"/>
                 </a:solidFill>
                 <a:latin typeface="Microsoft JhengHei" panose="020B0604030504040204" pitchFamily="34" charset="-120"/>
                 <a:ea typeface="Microsoft JhengHei" panose="020B0604030504040204" pitchFamily="34" charset="-120"/>
               </a:rPr>
-              <a:t> </a:t>
-            </a:r>
-            <a:r>
-              <a:rPr lang="en-US" sz="4267" b="1" dirty="0">
-                <a:solidFill>
-                  <a:srgbClr val="660033"/>
-                </a:solidFill>
-                <a:latin typeface="Microsoft JhengHei" panose="020B0604030504040204" pitchFamily="34" charset="-120"/>
-                <a:ea typeface="Microsoft JhengHei" panose="020B0604030504040204" pitchFamily="34" charset="-120"/>
-              </a:rPr>
-              <a:t>)</a:t>
+              <a:t> )</a:t>
             </a:r>
             <a:endParaRPr lang="vi-VN" sz="4267" b="1" dirty="0">
               <a:solidFill>
@@ -4197,57 +3853,7 @@
                 <a:latin typeface="微軟正黑體" pitchFamily="34" charset="-120"/>
                 <a:ea typeface="微軟正黑體" pitchFamily="34" charset="-120"/>
               </a:rPr>
-              <a:t>十字</a:t>
-            </a:r>
-            <a:r>
-              <a:rPr lang="zh-TW" altLang="en-US" sz="6400" b="1" dirty="0" smtClean="0">
-                <a:solidFill>
-                  <a:srgbClr val="660033"/>
-                </a:solidFill>
-                <a:latin typeface="微軟正黑體" pitchFamily="34" charset="-120"/>
-                <a:ea typeface="微軟正黑體" pitchFamily="34" charset="-120"/>
-              </a:rPr>
-              <a:t>架  十</a:t>
-            </a:r>
-            <a:r>
-              <a:rPr lang="zh-TW" altLang="en-US" sz="6400" b="1" dirty="0">
-                <a:solidFill>
-                  <a:srgbClr val="660033"/>
-                </a:solidFill>
-                <a:latin typeface="微軟正黑體" pitchFamily="34" charset="-120"/>
-                <a:ea typeface="微軟正黑體" pitchFamily="34" charset="-120"/>
-              </a:rPr>
-              <a:t>字</a:t>
-            </a:r>
-            <a:r>
-              <a:rPr lang="zh-TW" altLang="en-US" sz="6400" b="1" dirty="0" smtClean="0">
-                <a:solidFill>
-                  <a:srgbClr val="660033"/>
-                </a:solidFill>
-                <a:latin typeface="微軟正黑體" pitchFamily="34" charset="-120"/>
-                <a:ea typeface="微軟正黑體" pitchFamily="34" charset="-120"/>
-              </a:rPr>
-              <a:t>架  永</a:t>
-            </a:r>
-            <a:r>
-              <a:rPr lang="zh-TW" altLang="en-US" sz="6400" b="1" dirty="0">
-                <a:solidFill>
-                  <a:srgbClr val="660033"/>
-                </a:solidFill>
-                <a:latin typeface="微軟正黑體" pitchFamily="34" charset="-120"/>
-                <a:ea typeface="微軟正黑體" pitchFamily="34" charset="-120"/>
-              </a:rPr>
-              <a:t>是我的榮</a:t>
-            </a:r>
-            <a:r>
-              <a:rPr lang="zh-TW" altLang="en-US" sz="6400" b="1" dirty="0">
-                <a:solidFill>
-                  <a:srgbClr val="660033"/>
-                </a:solidFill>
-                <a:latin typeface="微軟正黑體" pitchFamily="34" charset="-120"/>
-                <a:ea typeface="微軟正黑體" pitchFamily="34" charset="-120"/>
-              </a:rPr>
-              <a:t>耀</a:t>
+              <a:t>十字架  十字架  永是我的榮耀</a:t>
             </a:r>
             <a:endParaRPr lang="en-US" altLang="zh-TW" sz="6400" b="1" dirty="0">
               <a:solidFill>
@@ -4269,37 +3875,7 @@
                 <a:latin typeface="微軟正黑體" pitchFamily="34" charset="-120"/>
                 <a:ea typeface="微軟正黑體" pitchFamily="34" charset="-120"/>
               </a:rPr>
-              <a:t>我</a:t>
-            </a:r>
-            <a:r>
-              <a:rPr lang="zh-TW" altLang="en-US" sz="6400" b="1" dirty="0">
-                <a:solidFill>
-                  <a:srgbClr val="660033"/>
-                </a:solidFill>
-                <a:latin typeface="微軟正黑體" pitchFamily="34" charset="-120"/>
-                <a:ea typeface="微軟正黑體" pitchFamily="34" charset="-120"/>
-              </a:rPr>
-              <a:t>眾罪都洗清</a:t>
-            </a:r>
-            <a:r>
-              <a:rPr lang="zh-TW" altLang="en-US" sz="6400" b="1" dirty="0" smtClean="0">
-                <a:solidFill>
-                  <a:srgbClr val="660033"/>
-                </a:solidFill>
-                <a:latin typeface="微軟正黑體" pitchFamily="34" charset="-120"/>
-                <a:ea typeface="微軟正黑體" pitchFamily="34" charset="-120"/>
-              </a:rPr>
-              <a:t>潔  唯</a:t>
-            </a:r>
-            <a:r>
-              <a:rPr lang="zh-TW" altLang="en-US" sz="6400" b="1" dirty="0">
-                <a:solidFill>
-                  <a:srgbClr val="660033"/>
-                </a:solidFill>
-                <a:latin typeface="微軟正黑體" pitchFamily="34" charset="-120"/>
-                <a:ea typeface="微軟正黑體" pitchFamily="34" charset="-120"/>
-              </a:rPr>
-              <a:t>靠耶穌寶血</a:t>
+              <a:t>我眾罪都洗清潔  唯靠耶穌寶血</a:t>
             </a:r>
             <a:endParaRPr lang="en-US" altLang="zh-TW" sz="6400" b="1" dirty="0">
               <a:solidFill>
@@ -4345,7 +3921,7 @@
               <a:t>( </a:t>
             </a:r>
             <a:r>
-              <a:rPr lang="en-US" altLang="zh-CN" sz="4267" b="1" smtClean="0">
+              <a:rPr lang="en-US" altLang="zh-CN" sz="4267" b="1">
                 <a:solidFill>
                   <a:srgbClr val="660033"/>
                 </a:solidFill>
@@ -4355,7 +3931,7 @@
               <a:t>Bonus</a:t>
             </a:r>
             <a:r>
-              <a:rPr lang="en-US" sz="4267" b="1" smtClean="0">
+              <a:rPr lang="en-US" sz="4267" b="1">
                 <a:solidFill>
                   <a:srgbClr val="660033"/>
                 </a:solidFill>
